--- a/Dynamic-Player-Transfer-Value-Prediction-using-AI-and-Multi-source-Data/Infosys Presentation.ppt.pptx
+++ b/Dynamic-Player-Transfer-Value-Prediction-using-AI-and-Multi-source-Data/Infosys Presentation.ppt.pptx
@@ -5,7 +5,7 @@
     <p:sldMasterId id="2147483648" r:id="rId1"/>
   </p:sldMasterIdLst>
   <p:notesMasterIdLst>
-    <p:notesMasterId r:id="rId11"/>
+    <p:notesMasterId r:id="rId14"/>
   </p:notesMasterIdLst>
   <p:sldIdLst>
     <p:sldId id="257" r:id="rId2"/>
@@ -15,8 +15,11 @@
     <p:sldId id="261" r:id="rId6"/>
     <p:sldId id="262" r:id="rId7"/>
     <p:sldId id="263" r:id="rId8"/>
-    <p:sldId id="264" r:id="rId9"/>
-    <p:sldId id="265" r:id="rId10"/>
+    <p:sldId id="268" r:id="rId9"/>
+    <p:sldId id="266" r:id="rId10"/>
+    <p:sldId id="267" r:id="rId11"/>
+    <p:sldId id="264" r:id="rId12"/>
+    <p:sldId id="265" r:id="rId13"/>
   </p:sldIdLst>
   <p:sldSz cx="12192000" cy="6858000"/>
   <p:notesSz cx="6858000" cy="9144000"/>
@@ -123,6 +126,89 @@
 </p:presentation>
 </file>
 
+<file path=ppt/revisionInfo.xml><?xml version="1.0" encoding="utf-8"?>
+<p1510:revInfo xmlns:a="http://schemas.openxmlformats.org/drawingml/2006/main" xmlns:r="http://schemas.openxmlformats.org/officeDocument/2006/relationships" xmlns:p1510="http://schemas.microsoft.com/office/powerpoint/2015/10/main">
+  <p1510:revLst>
+    <p1510:client id="{58A30D6C-8FEF-489C-88DF-5DBF5FBD1F2E}" v="4" dt="2026-04-11T11:51:13.110"/>
+  </p1510:revLst>
+</p1510:revInfo>
+</file>
+
+<file path=ppt/changesInfos/changesInfo1.xml><?xml version="1.0" encoding="utf-8"?>
+<pc:chgInfo xmlns:a="http://schemas.openxmlformats.org/drawingml/2006/main" xmlns:r="http://schemas.openxmlformats.org/officeDocument/2006/relationships" xmlns:ac="http://schemas.microsoft.com/office/drawing/2013/main/command" xmlns:pc="http://schemas.microsoft.com/office/powerpoint/2013/main/command">
+  <pc:docChgLst>
+    <pc:chgData name="inumulapavani@gmail.com" userId="348581545ad6be83" providerId="LiveId" clId="{523DEC5B-0533-41B5-94A4-FA77647C6A20}"/>
+    <pc:docChg chg="addSld modSld">
+      <pc:chgData name="inumulapavani@gmail.com" userId="348581545ad6be83" providerId="LiveId" clId="{523DEC5B-0533-41B5-94A4-FA77647C6A20}" dt="2026-04-11T11:52:25.039" v="52" actId="1076"/>
+      <pc:docMkLst>
+        <pc:docMk/>
+      </pc:docMkLst>
+      <pc:sldChg chg="addSp modSp mod">
+        <pc:chgData name="inumulapavani@gmail.com" userId="348581545ad6be83" providerId="LiveId" clId="{523DEC5B-0533-41B5-94A4-FA77647C6A20}" dt="2026-04-11T11:52:06.965" v="48" actId="1076"/>
+        <pc:sldMkLst>
+          <pc:docMk/>
+          <pc:sldMk cId="3225181587" sldId="266"/>
+        </pc:sldMkLst>
+        <pc:spChg chg="add mod">
+          <ac:chgData name="inumulapavani@gmail.com" userId="348581545ad6be83" providerId="LiveId" clId="{523DEC5B-0533-41B5-94A4-FA77647C6A20}" dt="2026-04-11T11:52:06.965" v="48" actId="1076"/>
+          <ac:spMkLst>
+            <pc:docMk/>
+            <pc:sldMk cId="3225181587" sldId="266"/>
+            <ac:spMk id="2" creationId="{999DD811-4AA9-19A3-7E71-95AB3F8003CA}"/>
+          </ac:spMkLst>
+        </pc:spChg>
+        <pc:picChg chg="add mod">
+          <ac:chgData name="inumulapavani@gmail.com" userId="348581545ad6be83" providerId="LiveId" clId="{523DEC5B-0533-41B5-94A4-FA77647C6A20}" dt="2026-04-11T11:51:57.520" v="47" actId="14100"/>
+          <ac:picMkLst>
+            <pc:docMk/>
+            <pc:sldMk cId="3225181587" sldId="266"/>
+            <ac:picMk id="3" creationId="{A97F2145-1161-F6F4-7944-F0E0DE78ADC8}"/>
+          </ac:picMkLst>
+        </pc:picChg>
+      </pc:sldChg>
+      <pc:sldChg chg="addSp modSp new mod">
+        <pc:chgData name="inumulapavani@gmail.com" userId="348581545ad6be83" providerId="LiveId" clId="{523DEC5B-0533-41B5-94A4-FA77647C6A20}" dt="2026-04-11T11:52:25.039" v="52" actId="1076"/>
+        <pc:sldMkLst>
+          <pc:docMk/>
+          <pc:sldMk cId="2440734425" sldId="267"/>
+        </pc:sldMkLst>
+        <pc:picChg chg="add mod">
+          <ac:chgData name="inumulapavani@gmail.com" userId="348581545ad6be83" providerId="LiveId" clId="{523DEC5B-0533-41B5-94A4-FA77647C6A20}" dt="2026-04-11T11:52:25.039" v="52" actId="1076"/>
+          <ac:picMkLst>
+            <pc:docMk/>
+            <pc:sldMk cId="2440734425" sldId="267"/>
+            <ac:picMk id="3" creationId="{70D49A9F-EB56-3770-66B5-EE4F5CFD2655}"/>
+          </ac:picMkLst>
+        </pc:picChg>
+      </pc:sldChg>
+      <pc:sldChg chg="addSp modSp new mod">
+        <pc:chgData name="inumulapavani@gmail.com" userId="348581545ad6be83" providerId="LiveId" clId="{523DEC5B-0533-41B5-94A4-FA77647C6A20}" dt="2026-04-11T11:52:13.079" v="49" actId="1076"/>
+        <pc:sldMkLst>
+          <pc:docMk/>
+          <pc:sldMk cId="974312976" sldId="268"/>
+        </pc:sldMkLst>
+        <pc:spChg chg="add mod">
+          <ac:chgData name="inumulapavani@gmail.com" userId="348581545ad6be83" providerId="LiveId" clId="{523DEC5B-0533-41B5-94A4-FA77647C6A20}" dt="2026-04-11T11:52:13.079" v="49" actId="1076"/>
+          <ac:spMkLst>
+            <pc:docMk/>
+            <pc:sldMk cId="974312976" sldId="268"/>
+            <ac:spMk id="4" creationId="{935D8B43-A350-AB40-35B8-1F43D19A059C}"/>
+          </ac:spMkLst>
+        </pc:spChg>
+        <pc:picChg chg="add mod">
+          <ac:chgData name="inumulapavani@gmail.com" userId="348581545ad6be83" providerId="LiveId" clId="{523DEC5B-0533-41B5-94A4-FA77647C6A20}" dt="2026-04-11T11:50:13.449" v="32" actId="14100"/>
+          <ac:picMkLst>
+            <pc:docMk/>
+            <pc:sldMk cId="974312976" sldId="268"/>
+            <ac:picMk id="3" creationId="{734AF43B-03EE-F81B-83FA-94A2F1729C19}"/>
+          </ac:picMkLst>
+        </pc:picChg>
+      </pc:sldChg>
+    </pc:docChg>
+  </pc:docChgLst>
+</pc:chgInfo>
+</file>
+
 <file path=ppt/notesMasters/notesMaster1.xml><?xml version="1.0" encoding="utf-8"?>
 <p:notesMaster xmlns:a="http://schemas.openxmlformats.org/drawingml/2006/main" xmlns:r="http://schemas.openxmlformats.org/officeDocument/2006/relationships" xmlns:p="http://schemas.openxmlformats.org/presentationml/2006/main">
   <p:cSld>
@@ -205,7 +291,7 @@
           <a:p>
             <a:fld id="{C28BDFD6-DD3C-4712-9FDA-7B9CEC0D6A7E}" type="datetimeFigureOut">
               <a:rPr lang="en-IN" smtClean="0"/>
-              <a:t>01-04-2026</a:t>
+              <a:t>11-04-2026</a:t>
             </a:fld>
             <a:endParaRPr lang="en-IN"/>
           </a:p>
@@ -790,7 +876,7 @@
           <a:p>
             <a:fld id="{B504E5D2-0726-4906-9913-A1A21044F92D}" type="datetimeFigureOut">
               <a:rPr lang="en-IN" smtClean="0"/>
-              <a:t>01-04-2026</a:t>
+              <a:t>11-04-2026</a:t>
             </a:fld>
             <a:endParaRPr lang="en-IN"/>
           </a:p>
@@ -990,7 +1076,7 @@
           <a:p>
             <a:fld id="{B504E5D2-0726-4906-9913-A1A21044F92D}" type="datetimeFigureOut">
               <a:rPr lang="en-IN" smtClean="0"/>
-              <a:t>01-04-2026</a:t>
+              <a:t>11-04-2026</a:t>
             </a:fld>
             <a:endParaRPr lang="en-IN"/>
           </a:p>
@@ -1200,7 +1286,7 @@
           <a:p>
             <a:fld id="{B504E5D2-0726-4906-9913-A1A21044F92D}" type="datetimeFigureOut">
               <a:rPr lang="en-IN" smtClean="0"/>
-              <a:t>01-04-2026</a:t>
+              <a:t>11-04-2026</a:t>
             </a:fld>
             <a:endParaRPr lang="en-IN"/>
           </a:p>
@@ -1400,7 +1486,7 @@
           <a:p>
             <a:fld id="{B504E5D2-0726-4906-9913-A1A21044F92D}" type="datetimeFigureOut">
               <a:rPr lang="en-IN" smtClean="0"/>
-              <a:t>01-04-2026</a:t>
+              <a:t>11-04-2026</a:t>
             </a:fld>
             <a:endParaRPr lang="en-IN"/>
           </a:p>
@@ -1676,7 +1762,7 @@
           <a:p>
             <a:fld id="{B504E5D2-0726-4906-9913-A1A21044F92D}" type="datetimeFigureOut">
               <a:rPr lang="en-IN" smtClean="0"/>
-              <a:t>01-04-2026</a:t>
+              <a:t>11-04-2026</a:t>
             </a:fld>
             <a:endParaRPr lang="en-IN"/>
           </a:p>
@@ -1944,7 +2030,7 @@
           <a:p>
             <a:fld id="{B504E5D2-0726-4906-9913-A1A21044F92D}" type="datetimeFigureOut">
               <a:rPr lang="en-IN" smtClean="0"/>
-              <a:t>01-04-2026</a:t>
+              <a:t>11-04-2026</a:t>
             </a:fld>
             <a:endParaRPr lang="en-IN"/>
           </a:p>
@@ -2359,7 +2445,7 @@
           <a:p>
             <a:fld id="{B504E5D2-0726-4906-9913-A1A21044F92D}" type="datetimeFigureOut">
               <a:rPr lang="en-IN" smtClean="0"/>
-              <a:t>01-04-2026</a:t>
+              <a:t>11-04-2026</a:t>
             </a:fld>
             <a:endParaRPr lang="en-IN"/>
           </a:p>
@@ -2501,7 +2587,7 @@
           <a:p>
             <a:fld id="{B504E5D2-0726-4906-9913-A1A21044F92D}" type="datetimeFigureOut">
               <a:rPr lang="en-IN" smtClean="0"/>
-              <a:t>01-04-2026</a:t>
+              <a:t>11-04-2026</a:t>
             </a:fld>
             <a:endParaRPr lang="en-IN"/>
           </a:p>
@@ -2614,7 +2700,7 @@
           <a:p>
             <a:fld id="{B504E5D2-0726-4906-9913-A1A21044F92D}" type="datetimeFigureOut">
               <a:rPr lang="en-IN" smtClean="0"/>
-              <a:t>01-04-2026</a:t>
+              <a:t>11-04-2026</a:t>
             </a:fld>
             <a:endParaRPr lang="en-IN"/>
           </a:p>
@@ -2927,7 +3013,7 @@
           <a:p>
             <a:fld id="{B504E5D2-0726-4906-9913-A1A21044F92D}" type="datetimeFigureOut">
               <a:rPr lang="en-IN" smtClean="0"/>
-              <a:t>01-04-2026</a:t>
+              <a:t>11-04-2026</a:t>
             </a:fld>
             <a:endParaRPr lang="en-IN"/>
           </a:p>
@@ -3220,7 +3306,7 @@
           <a:p>
             <a:fld id="{B504E5D2-0726-4906-9913-A1A21044F92D}" type="datetimeFigureOut">
               <a:rPr lang="en-IN" smtClean="0"/>
-              <a:t>01-04-2026</a:t>
+              <a:t>11-04-2026</a:t>
             </a:fld>
             <a:endParaRPr lang="en-IN"/>
           </a:p>
@@ -3463,7 +3549,7 @@
           <a:p>
             <a:fld id="{B504E5D2-0726-4906-9913-A1A21044F92D}" type="datetimeFigureOut">
               <a:rPr lang="en-IN" smtClean="0"/>
-              <a:t>01-04-2026</a:t>
+              <a:t>11-04-2026</a:t>
             </a:fld>
             <a:endParaRPr lang="en-IN"/>
           </a:p>
@@ -4203,6 +4289,298 @@
 </p:sld>
 </file>
 
+<file path=ppt/slides/slide10.xml><?xml version="1.0" encoding="utf-8"?>
+<p:sld xmlns:a="http://schemas.openxmlformats.org/drawingml/2006/main" xmlns:r="http://schemas.openxmlformats.org/officeDocument/2006/relationships" xmlns:p="http://schemas.openxmlformats.org/presentationml/2006/main">
+  <p:cSld>
+    <p:spTree>
+      <p:nvGrpSpPr>
+        <p:cNvPr id="1" name=""/>
+        <p:cNvGrpSpPr/>
+        <p:nvPr/>
+      </p:nvGrpSpPr>
+      <p:grpSpPr>
+        <a:xfrm>
+          <a:off x="0" y="0"/>
+          <a:ext cx="0" cy="0"/>
+          <a:chOff x="0" y="0"/>
+          <a:chExt cx="0" cy="0"/>
+        </a:xfrm>
+      </p:grpSpPr>
+      <p:pic>
+        <p:nvPicPr>
+          <p:cNvPr id="3" name="Picture 2">
+            <a:extLst>
+              <a:ext uri="{FF2B5EF4-FFF2-40B4-BE49-F238E27FC236}">
+                <a16:creationId xmlns:a16="http://schemas.microsoft.com/office/drawing/2014/main" id="{70D49A9F-EB56-3770-66B5-EE4F5CFD2655}"/>
+              </a:ext>
+            </a:extLst>
+          </p:cNvPr>
+          <p:cNvPicPr>
+            <a:picLocks noChangeAspect="1"/>
+          </p:cNvPicPr>
+          <p:nvPr/>
+        </p:nvPicPr>
+        <p:blipFill>
+          <a:blip r:embed="rId2">
+            <a:extLst>
+              <a:ext uri="{28A0092B-C50C-407E-A947-70E740481C1C}">
+                <a14:useLocalDpi xmlns:a14="http://schemas.microsoft.com/office/drawing/2010/main" val="0"/>
+              </a:ext>
+            </a:extLst>
+          </a:blip>
+          <a:stretch>
+            <a:fillRect/>
+          </a:stretch>
+        </p:blipFill>
+        <p:spPr>
+          <a:xfrm>
+            <a:off x="0" y="265472"/>
+            <a:ext cx="12192000" cy="6135329"/>
+          </a:xfrm>
+          <a:prstGeom prst="rect">
+            <a:avLst/>
+          </a:prstGeom>
+        </p:spPr>
+      </p:pic>
+    </p:spTree>
+    <p:extLst>
+      <p:ext uri="{BB962C8B-B14F-4D97-AF65-F5344CB8AC3E}">
+        <p14:creationId xmlns:p14="http://schemas.microsoft.com/office/powerpoint/2010/main" val="2440734425"/>
+      </p:ext>
+    </p:extLst>
+  </p:cSld>
+  <p:clrMapOvr>
+    <a:masterClrMapping/>
+  </p:clrMapOvr>
+</p:sld>
+</file>
+
+<file path=ppt/slides/slide11.xml><?xml version="1.0" encoding="utf-8"?>
+<p:sld xmlns:a="http://schemas.openxmlformats.org/drawingml/2006/main" xmlns:r="http://schemas.openxmlformats.org/officeDocument/2006/relationships" xmlns:p="http://schemas.openxmlformats.org/presentationml/2006/main">
+  <p:cSld>
+    <p:spTree>
+      <p:nvGrpSpPr>
+        <p:cNvPr id="1" name=""/>
+        <p:cNvGrpSpPr/>
+        <p:nvPr/>
+      </p:nvGrpSpPr>
+      <p:grpSpPr>
+        <a:xfrm>
+          <a:off x="0" y="0"/>
+          <a:ext cx="0" cy="0"/>
+          <a:chOff x="0" y="0"/>
+          <a:chExt cx="0" cy="0"/>
+        </a:xfrm>
+      </p:grpSpPr>
+      <p:pic>
+        <p:nvPicPr>
+          <p:cNvPr id="3" name="Picture 2">
+            <a:extLst>
+              <a:ext uri="{FF2B5EF4-FFF2-40B4-BE49-F238E27FC236}">
+                <a16:creationId xmlns:a16="http://schemas.microsoft.com/office/drawing/2014/main" id="{E8D58F0B-6FBA-765A-D86C-46C8076FAA9F}"/>
+              </a:ext>
+            </a:extLst>
+          </p:cNvPr>
+          <p:cNvPicPr>
+            <a:picLocks noChangeAspect="1"/>
+          </p:cNvPicPr>
+          <p:nvPr/>
+        </p:nvPicPr>
+        <p:blipFill>
+          <a:blip r:embed="rId2"/>
+          <a:stretch>
+            <a:fillRect/>
+          </a:stretch>
+        </p:blipFill>
+        <p:spPr>
+          <a:xfrm>
+            <a:off x="0" y="1"/>
+            <a:ext cx="4909930" cy="6858000"/>
+          </a:xfrm>
+          <a:prstGeom prst="rect">
+            <a:avLst/>
+          </a:prstGeom>
+        </p:spPr>
+      </p:pic>
+      <p:sp>
+        <p:nvSpPr>
+          <p:cNvPr id="4" name="TextBox 3">
+            <a:extLst>
+              <a:ext uri="{FF2B5EF4-FFF2-40B4-BE49-F238E27FC236}">
+                <a16:creationId xmlns:a16="http://schemas.microsoft.com/office/drawing/2014/main" id="{A09EB79B-582C-FC15-30C2-A4016FCABD3F}"/>
+              </a:ext>
+            </a:extLst>
+          </p:cNvPr>
+          <p:cNvSpPr txBox="1"/>
+          <p:nvPr/>
+        </p:nvSpPr>
+        <p:spPr>
+          <a:xfrm>
+            <a:off x="4909930" y="0"/>
+            <a:ext cx="7282070" cy="6986528"/>
+          </a:xfrm>
+          <a:prstGeom prst="rect">
+            <a:avLst/>
+          </a:prstGeom>
+          <a:noFill/>
+        </p:spPr>
+        <p:txBody>
+          <a:bodyPr wrap="square" rtlCol="0">
+            <a:spAutoFit/>
+          </a:bodyPr>
+          <a:lstStyle/>
+          <a:p>
+            <a:r>
+              <a:rPr lang="en-US" sz="2800" dirty="0">
+                <a:solidFill>
+                  <a:srgbClr val="00B050"/>
+                </a:solidFill>
+              </a:rPr>
+              <a:t>Conclusion:</a:t>
+            </a:r>
+          </a:p>
+          <a:p>
+            <a:endParaRPr lang="en-US" sz="2800" dirty="0">
+              <a:solidFill>
+                <a:srgbClr val="00B050"/>
+              </a:solidFill>
+            </a:endParaRPr>
+          </a:p>
+          <a:p>
+            <a:pPr marL="457200" indent="-457200">
+              <a:buFont typeface="Wingdings" panose="05000000000000000000" pitchFamily="2" charset="2"/>
+              <a:buChar char="Ø"/>
+            </a:pPr>
+            <a:r>
+              <a:rPr lang="en-US" sz="2800" dirty="0"/>
+              <a:t>Built an end-to-end AI pipeline: data collection, preprocessing, LSTM + ensemble modeling, and interactive UI.​</a:t>
+            </a:r>
+          </a:p>
+          <a:p>
+            <a:pPr marL="457200" indent="-457200">
+              <a:buFont typeface="Wingdings" panose="05000000000000000000" pitchFamily="2" charset="2"/>
+              <a:buChar char="Ø"/>
+            </a:pPr>
+            <a:r>
+              <a:rPr lang="en-US" sz="2800" dirty="0"/>
+              <a:t>Multi-source AI integration improves transparency and consistency in player transfer value estimation.​</a:t>
+            </a:r>
+          </a:p>
+          <a:p>
+            <a:r>
+              <a:rPr lang="en-US" sz="2800" dirty="0">
+                <a:solidFill>
+                  <a:srgbClr val="00B050"/>
+                </a:solidFill>
+              </a:rPr>
+              <a:t>Future Scope:</a:t>
+            </a:r>
+          </a:p>
+          <a:p>
+            <a:endParaRPr lang="en-US" sz="2800" dirty="0">
+              <a:solidFill>
+                <a:srgbClr val="00B050"/>
+              </a:solidFill>
+            </a:endParaRPr>
+          </a:p>
+          <a:p>
+            <a:pPr marL="457200" indent="-457200">
+              <a:buFont typeface="Wingdings" panose="05000000000000000000" pitchFamily="2" charset="2"/>
+              <a:buChar char="Ø"/>
+            </a:pPr>
+            <a:r>
+              <a:rPr lang="en-US" sz="2800" dirty="0"/>
+              <a:t>Extend to larger real-world datasets with live APIs and real-time news integration.​</a:t>
+            </a:r>
+          </a:p>
+          <a:p>
+            <a:pPr marL="457200" indent="-457200">
+              <a:buFont typeface="Wingdings" panose="05000000000000000000" pitchFamily="2" charset="2"/>
+              <a:buChar char="Ø"/>
+            </a:pPr>
+            <a:r>
+              <a:rPr lang="en-US" sz="2800" dirty="0"/>
+              <a:t>Incorporate more advanced deep learning models and explainability tools (e.g., feature importance, SHAP).​</a:t>
+            </a:r>
+          </a:p>
+          <a:p>
+            <a:endParaRPr lang="en-IN" sz="2800" dirty="0"/>
+          </a:p>
+        </p:txBody>
+      </p:sp>
+    </p:spTree>
+    <p:extLst>
+      <p:ext uri="{BB962C8B-B14F-4D97-AF65-F5344CB8AC3E}">
+        <p14:creationId xmlns:p14="http://schemas.microsoft.com/office/powerpoint/2010/main" val="2649127151"/>
+      </p:ext>
+    </p:extLst>
+  </p:cSld>
+  <p:clrMapOvr>
+    <a:masterClrMapping/>
+  </p:clrMapOvr>
+</p:sld>
+</file>
+
+<file path=ppt/slides/slide12.xml><?xml version="1.0" encoding="utf-8"?>
+<p:sld xmlns:a="http://schemas.openxmlformats.org/drawingml/2006/main" xmlns:r="http://schemas.openxmlformats.org/officeDocument/2006/relationships" xmlns:p="http://schemas.openxmlformats.org/presentationml/2006/main">
+  <p:cSld>
+    <p:spTree>
+      <p:nvGrpSpPr>
+        <p:cNvPr id="1" name=""/>
+        <p:cNvGrpSpPr/>
+        <p:nvPr/>
+      </p:nvGrpSpPr>
+      <p:grpSpPr>
+        <a:xfrm>
+          <a:off x="0" y="0"/>
+          <a:ext cx="0" cy="0"/>
+          <a:chOff x="0" y="0"/>
+          <a:chExt cx="0" cy="0"/>
+        </a:xfrm>
+      </p:grpSpPr>
+      <p:pic>
+        <p:nvPicPr>
+          <p:cNvPr id="3" name="Picture 2">
+            <a:extLst>
+              <a:ext uri="{FF2B5EF4-FFF2-40B4-BE49-F238E27FC236}">
+                <a16:creationId xmlns:a16="http://schemas.microsoft.com/office/drawing/2014/main" id="{3C6350B0-D7AE-0F00-622B-B943AD2FFB68}"/>
+              </a:ext>
+            </a:extLst>
+          </p:cNvPr>
+          <p:cNvPicPr>
+            <a:picLocks noChangeAspect="1"/>
+          </p:cNvPicPr>
+          <p:nvPr/>
+        </p:nvPicPr>
+        <p:blipFill>
+          <a:blip r:embed="rId2"/>
+          <a:stretch>
+            <a:fillRect/>
+          </a:stretch>
+        </p:blipFill>
+        <p:spPr>
+          <a:xfrm>
+            <a:off x="0" y="0"/>
+            <a:ext cx="12192000" cy="6858000"/>
+          </a:xfrm>
+          <a:prstGeom prst="rect">
+            <a:avLst/>
+          </a:prstGeom>
+        </p:spPr>
+      </p:pic>
+    </p:spTree>
+    <p:extLst>
+      <p:ext uri="{BB962C8B-B14F-4D97-AF65-F5344CB8AC3E}">
+        <p14:creationId xmlns:p14="http://schemas.microsoft.com/office/powerpoint/2010/main" val="3557564833"/>
+      </p:ext>
+    </p:extLst>
+  </p:cSld>
+  <p:clrMapOvr>
+    <a:masterClrMapping/>
+  </p:clrMapOvr>
+</p:sld>
+</file>
+
 <file path=ppt/slides/slide2.xml><?xml version="1.0" encoding="utf-8"?>
 <p:sld xmlns:a="http://schemas.openxmlformats.org/drawingml/2006/main" xmlns:r="http://schemas.openxmlformats.org/officeDocument/2006/relationships" xmlns:p="http://schemas.openxmlformats.org/presentationml/2006/main">
   <p:cSld>
@@ -5220,7 +5598,7 @@
           <p:cNvPr id="3" name="Picture 2">
             <a:extLst>
               <a:ext uri="{FF2B5EF4-FFF2-40B4-BE49-F238E27FC236}">
-                <a16:creationId xmlns:a16="http://schemas.microsoft.com/office/drawing/2014/main" id="{E8D58F0B-6FBA-765A-D86C-46C8076FAA9F}"/>
+                <a16:creationId xmlns:a16="http://schemas.microsoft.com/office/drawing/2014/main" id="{734AF43B-03EE-F81B-83FA-94A2F1729C19}"/>
               </a:ext>
             </a:extLst>
           </p:cNvPr>
@@ -5237,8 +5615,8 @@
         </p:blipFill>
         <p:spPr>
           <a:xfrm>
-            <a:off x="0" y="1"/>
-            <a:ext cx="4909930" cy="6858000"/>
+            <a:off x="0" y="786580"/>
+            <a:ext cx="12192000" cy="6071420"/>
           </a:xfrm>
           <a:prstGeom prst="rect">
             <a:avLst/>
@@ -5250,7 +5628,7 @@
           <p:cNvPr id="4" name="TextBox 3">
             <a:extLst>
               <a:ext uri="{FF2B5EF4-FFF2-40B4-BE49-F238E27FC236}">
-                <a16:creationId xmlns:a16="http://schemas.microsoft.com/office/drawing/2014/main" id="{A09EB79B-582C-FC15-30C2-A4016FCABD3F}"/>
+                <a16:creationId xmlns:a16="http://schemas.microsoft.com/office/drawing/2014/main" id="{935D8B43-A350-AB40-35B8-1F43D19A059C}"/>
               </a:ext>
             </a:extLst>
           </p:cNvPr>
@@ -5259,8 +5637,8 @@
         </p:nvSpPr>
         <p:spPr>
           <a:xfrm>
-            <a:off x="4909930" y="0"/>
-            <a:ext cx="7282070" cy="6986528"/>
+            <a:off x="4616245" y="179578"/>
+            <a:ext cx="3603524" cy="461665"/>
           </a:xfrm>
           <a:prstGeom prst="rect">
             <a:avLst/>
@@ -5274,87 +5652,20 @@
           <a:lstStyle/>
           <a:p>
             <a:r>
-              <a:rPr lang="en-US" sz="2800" dirty="0">
+              <a:rPr lang="en-IN" sz="2400" b="1" dirty="0">
                 <a:solidFill>
-                  <a:srgbClr val="00B050"/>
+                  <a:srgbClr val="FF0000"/>
                 </a:solidFill>
               </a:rPr>
-              <a:t>Conclusion:</a:t>
-            </a:r>
-          </a:p>
-          <a:p>
-            <a:endParaRPr lang="en-US" sz="2800" dirty="0">
-              <a:solidFill>
-                <a:srgbClr val="00B050"/>
-              </a:solidFill>
-            </a:endParaRPr>
-          </a:p>
-          <a:p>
-            <a:pPr marL="457200" indent="-457200">
-              <a:buFont typeface="Wingdings" panose="05000000000000000000" pitchFamily="2" charset="2"/>
-              <a:buChar char="Ø"/>
-            </a:pPr>
-            <a:r>
-              <a:rPr lang="en-US" sz="2800" dirty="0"/>
-              <a:t>Built an end-to-end AI pipeline: data collection, preprocessing, LSTM + ensemble modeling, and interactive UI.​</a:t>
-            </a:r>
-          </a:p>
-          <a:p>
-            <a:pPr marL="457200" indent="-457200">
-              <a:buFont typeface="Wingdings" panose="05000000000000000000" pitchFamily="2" charset="2"/>
-              <a:buChar char="Ø"/>
-            </a:pPr>
-            <a:r>
-              <a:rPr lang="en-US" sz="2800" dirty="0"/>
-              <a:t>Multi-source AI integration improves transparency and consistency in player transfer value estimation.​</a:t>
-            </a:r>
-          </a:p>
-          <a:p>
-            <a:r>
-              <a:rPr lang="en-US" sz="2800" dirty="0">
-                <a:solidFill>
-                  <a:srgbClr val="00B050"/>
-                </a:solidFill>
-              </a:rPr>
-              <a:t>Future Scope:</a:t>
-            </a:r>
-          </a:p>
-          <a:p>
-            <a:endParaRPr lang="en-US" sz="2800" dirty="0">
-              <a:solidFill>
-                <a:srgbClr val="00B050"/>
-              </a:solidFill>
-            </a:endParaRPr>
-          </a:p>
-          <a:p>
-            <a:pPr marL="457200" indent="-457200">
-              <a:buFont typeface="Wingdings" panose="05000000000000000000" pitchFamily="2" charset="2"/>
-              <a:buChar char="Ø"/>
-            </a:pPr>
-            <a:r>
-              <a:rPr lang="en-US" sz="2800" dirty="0"/>
-              <a:t>Extend to larger real-world datasets with live APIs and real-time news integration.​</a:t>
-            </a:r>
-          </a:p>
-          <a:p>
-            <a:pPr marL="457200" indent="-457200">
-              <a:buFont typeface="Wingdings" panose="05000000000000000000" pitchFamily="2" charset="2"/>
-              <a:buChar char="Ø"/>
-            </a:pPr>
-            <a:r>
-              <a:rPr lang="en-US" sz="2800" dirty="0"/>
-              <a:t>Incorporate more advanced deep learning models and explainability tools (e.g., feature importance, SHAP).​</a:t>
-            </a:r>
-          </a:p>
-          <a:p>
-            <a:endParaRPr lang="en-IN" sz="2800" dirty="0"/>
+              <a:t>MODEL OUTPUT</a:t>
+            </a:r>
           </a:p>
         </p:txBody>
       </p:sp>
     </p:spTree>
     <p:extLst>
       <p:ext uri="{BB962C8B-B14F-4D97-AF65-F5344CB8AC3E}">
-        <p14:creationId xmlns:p14="http://schemas.microsoft.com/office/powerpoint/2010/main" val="2649127151"/>
+        <p14:creationId xmlns:p14="http://schemas.microsoft.com/office/powerpoint/2010/main" val="974312976"/>
       </p:ext>
     </p:extLst>
   </p:cSld>
@@ -5386,7 +5697,7 @@
           <p:cNvPr id="3" name="Picture 2">
             <a:extLst>
               <a:ext uri="{FF2B5EF4-FFF2-40B4-BE49-F238E27FC236}">
-                <a16:creationId xmlns:a16="http://schemas.microsoft.com/office/drawing/2014/main" id="{3C6350B0-D7AE-0F00-622B-B943AD2FFB68}"/>
+                <a16:creationId xmlns:a16="http://schemas.microsoft.com/office/drawing/2014/main" id="{A97F2145-1161-F6F4-7944-F0E0DE78ADC8}"/>
               </a:ext>
             </a:extLst>
           </p:cNvPr>
@@ -5396,25 +5707,70 @@
           <p:nvPr/>
         </p:nvPicPr>
         <p:blipFill>
-          <a:blip r:embed="rId2"/>
+          <a:blip r:embed="rId2">
+            <a:extLst>
+              <a:ext uri="{28A0092B-C50C-407E-A947-70E740481C1C}">
+                <a14:useLocalDpi xmlns:a14="http://schemas.microsoft.com/office/drawing/2010/main" val="0"/>
+              </a:ext>
+            </a:extLst>
+          </a:blip>
           <a:stretch>
             <a:fillRect/>
           </a:stretch>
         </p:blipFill>
         <p:spPr>
           <a:xfrm>
-            <a:off x="0" y="0"/>
-            <a:ext cx="12192000" cy="6858000"/>
+            <a:off x="0" y="806245"/>
+            <a:ext cx="12192000" cy="6051755"/>
           </a:xfrm>
           <a:prstGeom prst="rect">
             <a:avLst/>
           </a:prstGeom>
         </p:spPr>
       </p:pic>
+      <p:sp>
+        <p:nvSpPr>
+          <p:cNvPr id="2" name="TextBox 1">
+            <a:extLst>
+              <a:ext uri="{FF2B5EF4-FFF2-40B4-BE49-F238E27FC236}">
+                <a16:creationId xmlns:a16="http://schemas.microsoft.com/office/drawing/2014/main" id="{999DD811-4AA9-19A3-7E71-95AB3F8003CA}"/>
+              </a:ext>
+            </a:extLst>
+          </p:cNvPr>
+          <p:cNvSpPr txBox="1"/>
+          <p:nvPr/>
+        </p:nvSpPr>
+        <p:spPr>
+          <a:xfrm>
+            <a:off x="4399935" y="273141"/>
+            <a:ext cx="2620297" cy="461665"/>
+          </a:xfrm>
+          <a:prstGeom prst="rect">
+            <a:avLst/>
+          </a:prstGeom>
+          <a:noFill/>
+        </p:spPr>
+        <p:txBody>
+          <a:bodyPr wrap="square" rtlCol="0">
+            <a:spAutoFit/>
+          </a:bodyPr>
+          <a:lstStyle/>
+          <a:p>
+            <a:r>
+              <a:rPr lang="en-IN" sz="2400" b="1" dirty="0">
+                <a:solidFill>
+                  <a:srgbClr val="FF0000"/>
+                </a:solidFill>
+              </a:rPr>
+              <a:t>Execution Output</a:t>
+            </a:r>
+          </a:p>
+        </p:txBody>
+      </p:sp>
     </p:spTree>
     <p:extLst>
       <p:ext uri="{BB962C8B-B14F-4D97-AF65-F5344CB8AC3E}">
-        <p14:creationId xmlns:p14="http://schemas.microsoft.com/office/powerpoint/2010/main" val="3557564833"/>
+        <p14:creationId xmlns:p14="http://schemas.microsoft.com/office/powerpoint/2010/main" val="3225181587"/>
       </p:ext>
     </p:extLst>
   </p:cSld>
